--- a/CoderCup AI T1/Presu-App_Presentacion.pptx
+++ b/CoderCup AI T1/Presu-App_Presentacion.pptx
@@ -119,6 +119,35 @@
     </p:ext>
   </p:extLst>
 </p:presentation>
+</file>
+
+<file path=ppt/changesInfos/changesInfo1.xml><?xml version="1.0" encoding="utf-8"?>
+<pc:chgInfo xmlns:a="http://schemas.openxmlformats.org/drawingml/2006/main" xmlns:r="http://schemas.openxmlformats.org/officeDocument/2006/relationships" xmlns:ac="http://schemas.microsoft.com/office/drawing/2013/main/command" xmlns:pc="http://schemas.microsoft.com/office/powerpoint/2013/main/command">
+  <pc:docChgLst>
+    <pc:chgData name="Matias Mendilaharzu" userId="7e4a1e2e9a4a7ce5" providerId="LiveId" clId="{1B65AB65-CDC8-467D-AFBB-6B2C2D246A75}"/>
+    <pc:docChg chg="modSld">
+      <pc:chgData name="Matias Mendilaharzu" userId="7e4a1e2e9a4a7ce5" providerId="LiveId" clId="{1B65AB65-CDC8-467D-AFBB-6B2C2D246A75}" dt="2026-08-17T20:48:11.272" v="22" actId="6549"/>
+      <pc:docMkLst>
+        <pc:docMk/>
+      </pc:docMkLst>
+      <pc:sldChg chg="modSp mod">
+        <pc:chgData name="Matias Mendilaharzu" userId="7e4a1e2e9a4a7ce5" providerId="LiveId" clId="{1B65AB65-CDC8-467D-AFBB-6B2C2D246A75}" dt="2026-08-17T20:48:11.272" v="22" actId="6549"/>
+        <pc:sldMkLst>
+          <pc:docMk/>
+          <pc:sldMk cId="0" sldId="256"/>
+        </pc:sldMkLst>
+        <pc:spChg chg="mod">
+          <ac:chgData name="Matias Mendilaharzu" userId="7e4a1e2e9a4a7ce5" providerId="LiveId" clId="{1B65AB65-CDC8-467D-AFBB-6B2C2D246A75}" dt="2026-08-17T20:48:11.272" v="22" actId="6549"/>
+          <ac:spMkLst>
+            <pc:docMk/>
+            <pc:sldMk cId="0" sldId="256"/>
+            <ac:spMk id="8" creationId="{00000000-0000-0000-0000-000000000000}"/>
+          </ac:spMkLst>
+        </pc:spChg>
+      </pc:sldChg>
+    </pc:docChg>
+  </pc:docChgLst>
+</pc:chgInfo>
 </file>
 
 <file path=ppt/notesMasters/notesMaster1.xml><?xml version="1.0" encoding="utf-8"?>
@@ -1442,6 +1471,13 @@
           </a:solidFill>
           <a:ln/>
         </p:spPr>
+        <p:txBody>
+          <a:bodyPr/>
+          <a:lstStyle/>
+          <a:p>
+            <a:endParaRPr lang="es-MX"/>
+          </a:p>
+        </p:txBody>
       </p:sp>
       <p:sp>
         <p:nvSpPr>
@@ -1462,6 +1498,13 @@
           </a:solidFill>
           <a:ln/>
         </p:spPr>
+        <p:txBody>
+          <a:bodyPr/>
+          <a:lstStyle/>
+          <a:p>
+            <a:endParaRPr lang="es-MX"/>
+          </a:p>
+        </p:txBody>
       </p:sp>
       <p:sp>
         <p:nvSpPr>
@@ -1482,6 +1525,13 @@
           </a:solidFill>
           <a:ln/>
         </p:spPr>
+        <p:txBody>
+          <a:bodyPr/>
+          <a:lstStyle/>
+          <a:p>
+            <a:endParaRPr lang="es-MX"/>
+          </a:p>
+        </p:txBody>
       </p:sp>
       <p:sp>
         <p:nvSpPr>
@@ -1502,6 +1552,13 @@
           </a:solidFill>
           <a:ln/>
         </p:spPr>
+        <p:txBody>
+          <a:bodyPr/>
+          <a:lstStyle/>
+          <a:p>
+            <a:endParaRPr lang="es-MX"/>
+          </a:p>
+        </p:txBody>
       </p:sp>
       <p:pic>
         <p:nvPicPr>
@@ -1640,7 +1697,7 @@
                 <a:ea typeface="Calibri" pitchFamily="34" charset="-122"/>
                 <a:cs typeface="Calibri" pitchFamily="34" charset="-120"/>
               </a:rPr>
-              <a:t> </a:t>
+              <a:t> con </a:t>
             </a:r>
             <a:r>
               <a:rPr lang="en-US" sz="1800" dirty="0" err="1">
@@ -1651,7 +1708,7 @@
                 <a:ea typeface="Calibri" pitchFamily="34" charset="-122"/>
                 <a:cs typeface="Calibri" pitchFamily="34" charset="-120"/>
               </a:rPr>
-              <a:t>integramente</a:t>
+              <a:t>Chatgpt</a:t>
             </a:r>
             <a:r>
               <a:rPr lang="en-US" sz="1800" dirty="0">
@@ -1662,29 +1719,7 @@
                 <a:ea typeface="Calibri" pitchFamily="34" charset="-122"/>
                 <a:cs typeface="Calibri" pitchFamily="34" charset="-120"/>
               </a:rPr>
-              <a:t> con Claude) </a:t>
-            </a:r>
-            <a:r>
-              <a:rPr lang="en-US" sz="1800" dirty="0" err="1">
-                <a:solidFill>
-                  <a:srgbClr val="9AA5B1"/>
-                </a:solidFill>
-                <a:latin typeface="Calibri" pitchFamily="34" charset="0"/>
-                <a:ea typeface="Calibri" pitchFamily="34" charset="-122"/>
-                <a:cs typeface="Calibri" pitchFamily="34" charset="-120"/>
-              </a:rPr>
-              <a:t>que</a:t>
-            </a:r>
-            <a:r>
-              <a:rPr lang="en-US" sz="1800" dirty="0">
-                <a:solidFill>
-                  <a:srgbClr val="9AA5B1"/>
-                </a:solidFill>
-                <a:latin typeface="Calibri" pitchFamily="34" charset="0"/>
-                <a:ea typeface="Calibri" pitchFamily="34" charset="-122"/>
-                <a:cs typeface="Calibri" pitchFamily="34" charset="-120"/>
-              </a:rPr>
-              <a:t> arma cotizaciones eléctricas en minutos, con los precios de mano de obra siempre al día </a:t>
+              <a:t>, Claude y Gemini) arma cotizaciones eléctricas en minutos, con los precios de mano de obra siempre al día </a:t>
             </a:r>
             <a:r>
               <a:rPr lang="en-US" sz="1800" dirty="0" err="1">
@@ -1836,6 +1871,13 @@
           </a:solidFill>
           <a:ln/>
         </p:spPr>
+        <p:txBody>
+          <a:bodyPr/>
+          <a:lstStyle/>
+          <a:p>
+            <a:endParaRPr lang="es-MX"/>
+          </a:p>
+        </p:txBody>
       </p:sp>
       <p:sp>
         <p:nvSpPr>
@@ -1934,6 +1976,13 @@
           </a:solidFill>
           <a:ln/>
         </p:spPr>
+        <p:txBody>
+          <a:bodyPr/>
+          <a:lstStyle/>
+          <a:p>
+            <a:endParaRPr lang="es-MX"/>
+          </a:p>
+        </p:txBody>
       </p:sp>
       <p:pic>
         <p:nvPicPr>
@@ -2017,6 +2066,13 @@
           </a:solidFill>
           <a:ln/>
         </p:spPr>
+        <p:txBody>
+          <a:bodyPr/>
+          <a:lstStyle/>
+          <a:p>
+            <a:endParaRPr lang="es-MX"/>
+          </a:p>
+        </p:txBody>
       </p:sp>
       <p:pic>
         <p:nvPicPr>
@@ -2100,6 +2156,13 @@
           </a:solidFill>
           <a:ln/>
         </p:spPr>
+        <p:txBody>
+          <a:bodyPr/>
+          <a:lstStyle/>
+          <a:p>
+            <a:endParaRPr lang="es-MX"/>
+          </a:p>
+        </p:txBody>
       </p:sp>
       <p:pic>
         <p:nvPicPr>
@@ -2183,6 +2246,13 @@
           </a:solidFill>
           <a:ln/>
         </p:spPr>
+        <p:txBody>
+          <a:bodyPr/>
+          <a:lstStyle/>
+          <a:p>
+            <a:endParaRPr lang="es-MX"/>
+          </a:p>
+        </p:txBody>
       </p:sp>
       <p:pic>
         <p:nvPicPr>
@@ -2491,6 +2561,13 @@
             </a:outerShdw>
           </a:effectLst>
         </p:spPr>
+        <p:txBody>
+          <a:bodyPr/>
+          <a:lstStyle/>
+          <a:p>
+            <a:endParaRPr lang="es-MX"/>
+          </a:p>
+        </p:txBody>
       </p:sp>
       <p:sp>
         <p:nvSpPr>
@@ -2511,6 +2588,13 @@
           </a:solidFill>
           <a:ln/>
         </p:spPr>
+        <p:txBody>
+          <a:bodyPr/>
+          <a:lstStyle/>
+          <a:p>
+            <a:endParaRPr lang="es-MX"/>
+          </a:p>
+        </p:txBody>
       </p:sp>
       <p:pic>
         <p:nvPicPr>
@@ -2647,6 +2731,13 @@
             </a:outerShdw>
           </a:effectLst>
         </p:spPr>
+        <p:txBody>
+          <a:bodyPr/>
+          <a:lstStyle/>
+          <a:p>
+            <a:endParaRPr lang="es-MX"/>
+          </a:p>
+        </p:txBody>
       </p:sp>
       <p:sp>
         <p:nvSpPr>
@@ -2667,6 +2758,13 @@
           </a:solidFill>
           <a:ln/>
         </p:spPr>
+        <p:txBody>
+          <a:bodyPr/>
+          <a:lstStyle/>
+          <a:p>
+            <a:endParaRPr lang="es-MX"/>
+          </a:p>
+        </p:txBody>
       </p:sp>
       <p:pic>
         <p:nvPicPr>
@@ -2803,6 +2901,13 @@
             </a:outerShdw>
           </a:effectLst>
         </p:spPr>
+        <p:txBody>
+          <a:bodyPr/>
+          <a:lstStyle/>
+          <a:p>
+            <a:endParaRPr lang="es-MX"/>
+          </a:p>
+        </p:txBody>
       </p:sp>
       <p:sp>
         <p:nvSpPr>
@@ -2823,6 +2928,13 @@
           </a:solidFill>
           <a:ln/>
         </p:spPr>
+        <p:txBody>
+          <a:bodyPr/>
+          <a:lstStyle/>
+          <a:p>
+            <a:endParaRPr lang="es-MX"/>
+          </a:p>
+        </p:txBody>
       </p:sp>
       <p:pic>
         <p:nvPicPr>
@@ -2959,6 +3071,13 @@
             </a:outerShdw>
           </a:effectLst>
         </p:spPr>
+        <p:txBody>
+          <a:bodyPr/>
+          <a:lstStyle/>
+          <a:p>
+            <a:endParaRPr lang="es-MX"/>
+          </a:p>
+        </p:txBody>
       </p:sp>
       <p:sp>
         <p:nvSpPr>
@@ -2979,6 +3098,13 @@
           </a:solidFill>
           <a:ln/>
         </p:spPr>
+        <p:txBody>
+          <a:bodyPr/>
+          <a:lstStyle/>
+          <a:p>
+            <a:endParaRPr lang="es-MX"/>
+          </a:p>
+        </p:txBody>
       </p:sp>
       <p:pic>
         <p:nvPicPr>
@@ -3251,6 +3377,13 @@
           </a:solidFill>
           <a:ln/>
         </p:spPr>
+        <p:txBody>
+          <a:bodyPr/>
+          <a:lstStyle/>
+          <a:p>
+            <a:endParaRPr lang="es-MX"/>
+          </a:p>
+        </p:txBody>
       </p:sp>
       <p:pic>
         <p:nvPicPr>
@@ -3376,6 +3509,13 @@
             <a:prstDash val="dash"/>
           </a:ln>
         </p:spPr>
+        <p:txBody>
+          <a:bodyPr/>
+          <a:lstStyle/>
+          <a:p>
+            <a:endParaRPr lang="es-MX"/>
+          </a:p>
+        </p:txBody>
       </p:sp>
       <p:sp>
         <p:nvSpPr>
@@ -3396,6 +3536,13 @@
           </a:solidFill>
           <a:ln/>
         </p:spPr>
+        <p:txBody>
+          <a:bodyPr/>
+          <a:lstStyle/>
+          <a:p>
+            <a:endParaRPr lang="es-MX"/>
+          </a:p>
+        </p:txBody>
       </p:sp>
       <p:pic>
         <p:nvPicPr>
@@ -3521,6 +3668,13 @@
             <a:prstDash val="dash"/>
           </a:ln>
         </p:spPr>
+        <p:txBody>
+          <a:bodyPr/>
+          <a:lstStyle/>
+          <a:p>
+            <a:endParaRPr lang="es-MX"/>
+          </a:p>
+        </p:txBody>
       </p:sp>
       <p:sp>
         <p:nvSpPr>
@@ -3541,6 +3695,13 @@
           </a:solidFill>
           <a:ln/>
         </p:spPr>
+        <p:txBody>
+          <a:bodyPr/>
+          <a:lstStyle/>
+          <a:p>
+            <a:endParaRPr lang="es-MX"/>
+          </a:p>
+        </p:txBody>
       </p:sp>
       <p:pic>
         <p:nvPicPr>
@@ -3666,6 +3827,13 @@
             <a:prstDash val="dash"/>
           </a:ln>
         </p:spPr>
+        <p:txBody>
+          <a:bodyPr/>
+          <a:lstStyle/>
+          <a:p>
+            <a:endParaRPr lang="es-MX"/>
+          </a:p>
+        </p:txBody>
       </p:sp>
       <p:sp>
         <p:nvSpPr>
@@ -3686,6 +3854,13 @@
           </a:solidFill>
           <a:ln/>
         </p:spPr>
+        <p:txBody>
+          <a:bodyPr/>
+          <a:lstStyle/>
+          <a:p>
+            <a:endParaRPr lang="es-MX"/>
+          </a:p>
+        </p:txBody>
       </p:sp>
       <p:pic>
         <p:nvPicPr>
@@ -3919,6 +4094,13 @@
           </a:solidFill>
           <a:ln/>
         </p:spPr>
+        <p:txBody>
+          <a:bodyPr/>
+          <a:lstStyle/>
+          <a:p>
+            <a:endParaRPr lang="es-MX"/>
+          </a:p>
+        </p:txBody>
       </p:sp>
       <p:pic>
         <p:nvPicPr>
@@ -4043,6 +4225,13 @@
           </a:solidFill>
           <a:ln/>
         </p:spPr>
+        <p:txBody>
+          <a:bodyPr/>
+          <a:lstStyle/>
+          <a:p>
+            <a:endParaRPr lang="es-MX"/>
+          </a:p>
+        </p:txBody>
       </p:sp>
       <p:sp>
         <p:nvSpPr>
@@ -4143,6 +4332,13 @@
           </a:solidFill>
           <a:ln/>
         </p:spPr>
+        <p:txBody>
+          <a:bodyPr/>
+          <a:lstStyle/>
+          <a:p>
+            <a:endParaRPr lang="es-MX"/>
+          </a:p>
+        </p:txBody>
       </p:sp>
       <p:sp>
         <p:nvSpPr>
@@ -4243,6 +4439,13 @@
           </a:solidFill>
           <a:ln/>
         </p:spPr>
+        <p:txBody>
+          <a:bodyPr/>
+          <a:lstStyle/>
+          <a:p>
+            <a:endParaRPr lang="es-MX"/>
+          </a:p>
+        </p:txBody>
       </p:sp>
       <p:sp>
         <p:nvSpPr>
@@ -4343,6 +4546,13 @@
           </a:solidFill>
           <a:ln/>
         </p:spPr>
+        <p:txBody>
+          <a:bodyPr/>
+          <a:lstStyle/>
+          <a:p>
+            <a:endParaRPr lang="es-MX"/>
+          </a:p>
+        </p:txBody>
       </p:sp>
       <p:sp>
         <p:nvSpPr>
@@ -4552,6 +4762,13 @@
           </a:solidFill>
           <a:ln/>
         </p:spPr>
+        <p:txBody>
+          <a:bodyPr/>
+          <a:lstStyle/>
+          <a:p>
+            <a:endParaRPr lang="es-MX"/>
+          </a:p>
+        </p:txBody>
       </p:sp>
       <p:pic>
         <p:nvPicPr>
@@ -4676,6 +4893,13 @@
           </a:solidFill>
           <a:ln/>
         </p:spPr>
+        <p:txBody>
+          <a:bodyPr/>
+          <a:lstStyle/>
+          <a:p>
+            <a:endParaRPr lang="es-MX"/>
+          </a:p>
+        </p:txBody>
       </p:sp>
       <p:sp>
         <p:nvSpPr>
@@ -4774,6 +4998,13 @@
           </a:solidFill>
           <a:ln/>
         </p:spPr>
+        <p:txBody>
+          <a:bodyPr/>
+          <a:lstStyle/>
+          <a:p>
+            <a:endParaRPr lang="es-MX"/>
+          </a:p>
+        </p:txBody>
       </p:sp>
       <p:sp>
         <p:nvSpPr>
@@ -4833,6 +5064,13 @@
           </a:solidFill>
           <a:ln/>
         </p:spPr>
+        <p:txBody>
+          <a:bodyPr/>
+          <a:lstStyle/>
+          <a:p>
+            <a:endParaRPr lang="es-MX"/>
+          </a:p>
+        </p:txBody>
       </p:sp>
       <p:sp>
         <p:nvSpPr>
@@ -4892,6 +5130,13 @@
           </a:solidFill>
           <a:ln/>
         </p:spPr>
+        <p:txBody>
+          <a:bodyPr/>
+          <a:lstStyle/>
+          <a:p>
+            <a:endParaRPr lang="es-MX"/>
+          </a:p>
+        </p:txBody>
       </p:sp>
       <p:sp>
         <p:nvSpPr>
@@ -4953,6 +5198,13 @@
           </a:solidFill>
           <a:ln/>
         </p:spPr>
+        <p:txBody>
+          <a:bodyPr/>
+          <a:lstStyle/>
+          <a:p>
+            <a:endParaRPr lang="es-MX"/>
+          </a:p>
+        </p:txBody>
       </p:sp>
       <p:sp>
         <p:nvSpPr>
@@ -5051,6 +5303,13 @@
           </a:solidFill>
           <a:ln/>
         </p:spPr>
+        <p:txBody>
+          <a:bodyPr/>
+          <a:lstStyle/>
+          <a:p>
+            <a:endParaRPr lang="es-MX"/>
+          </a:p>
+        </p:txBody>
       </p:sp>
       <p:sp>
         <p:nvSpPr>
@@ -5110,6 +5369,13 @@
           </a:solidFill>
           <a:ln/>
         </p:spPr>
+        <p:txBody>
+          <a:bodyPr/>
+          <a:lstStyle/>
+          <a:p>
+            <a:endParaRPr lang="es-MX"/>
+          </a:p>
+        </p:txBody>
       </p:sp>
       <p:sp>
         <p:nvSpPr>
@@ -5169,6 +5435,13 @@
           </a:solidFill>
           <a:ln/>
         </p:spPr>
+        <p:txBody>
+          <a:bodyPr/>
+          <a:lstStyle/>
+          <a:p>
+            <a:endParaRPr lang="es-MX"/>
+          </a:p>
+        </p:txBody>
       </p:sp>
       <p:sp>
         <p:nvSpPr>
@@ -5300,6 +5573,13 @@
           </a:solidFill>
           <a:ln/>
         </p:spPr>
+        <p:txBody>
+          <a:bodyPr/>
+          <a:lstStyle/>
+          <a:p>
+            <a:endParaRPr lang="es-MX"/>
+          </a:p>
+        </p:txBody>
       </p:sp>
       <p:pic>
         <p:nvPicPr>
@@ -5436,6 +5716,13 @@
             </a:outerShdw>
           </a:effectLst>
         </p:spPr>
+        <p:txBody>
+          <a:bodyPr/>
+          <a:lstStyle/>
+          <a:p>
+            <a:endParaRPr lang="es-MX"/>
+          </a:p>
+        </p:txBody>
       </p:sp>
       <p:sp>
         <p:nvSpPr>
@@ -5548,6 +5835,13 @@
             </a:outerShdw>
           </a:effectLst>
         </p:spPr>
+        <p:txBody>
+          <a:bodyPr/>
+          <a:lstStyle/>
+          <a:p>
+            <a:endParaRPr lang="es-MX"/>
+          </a:p>
+        </p:txBody>
       </p:sp>
       <p:sp>
         <p:nvSpPr>
@@ -5660,6 +5954,13 @@
             </a:outerShdw>
           </a:effectLst>
         </p:spPr>
+        <p:txBody>
+          <a:bodyPr/>
+          <a:lstStyle/>
+          <a:p>
+            <a:endParaRPr lang="es-MX"/>
+          </a:p>
+        </p:txBody>
       </p:sp>
       <p:sp>
         <p:nvSpPr>
@@ -5760,6 +6061,13 @@
           </a:solidFill>
           <a:ln/>
         </p:spPr>
+        <p:txBody>
+          <a:bodyPr/>
+          <a:lstStyle/>
+          <a:p>
+            <a:endParaRPr lang="es-MX"/>
+          </a:p>
+        </p:txBody>
       </p:sp>
       <p:sp>
         <p:nvSpPr>
@@ -5780,6 +6088,13 @@
           </a:solidFill>
           <a:ln/>
         </p:spPr>
+        <p:txBody>
+          <a:bodyPr/>
+          <a:lstStyle/>
+          <a:p>
+            <a:endParaRPr lang="es-MX"/>
+          </a:p>
+        </p:txBody>
       </p:sp>
       <p:pic>
         <p:nvPicPr>
@@ -5974,6 +6289,13 @@
           </a:solidFill>
           <a:ln/>
         </p:spPr>
+        <p:txBody>
+          <a:bodyPr/>
+          <a:lstStyle/>
+          <a:p>
+            <a:endParaRPr lang="es-MX"/>
+          </a:p>
+        </p:txBody>
       </p:sp>
       <p:pic>
         <p:nvPicPr>
@@ -6098,6 +6420,13 @@
           </a:solidFill>
           <a:ln/>
         </p:spPr>
+        <p:txBody>
+          <a:bodyPr/>
+          <a:lstStyle/>
+          <a:p>
+            <a:endParaRPr lang="es-MX"/>
+          </a:p>
+        </p:txBody>
       </p:sp>
       <p:sp>
         <p:nvSpPr>
@@ -6118,6 +6447,13 @@
           </a:solidFill>
           <a:ln/>
         </p:spPr>
+        <p:txBody>
+          <a:bodyPr/>
+          <a:lstStyle/>
+          <a:p>
+            <a:endParaRPr lang="es-MX"/>
+          </a:p>
+        </p:txBody>
       </p:sp>
       <p:sp>
         <p:nvSpPr>
@@ -6179,6 +6515,13 @@
           </a:solidFill>
           <a:ln/>
         </p:spPr>
+        <p:txBody>
+          <a:bodyPr/>
+          <a:lstStyle/>
+          <a:p>
+            <a:endParaRPr lang="es-MX"/>
+          </a:p>
+        </p:txBody>
       </p:sp>
       <p:sp>
         <p:nvSpPr>
@@ -6199,6 +6542,13 @@
           </a:solidFill>
           <a:ln/>
         </p:spPr>
+        <p:txBody>
+          <a:bodyPr/>
+          <a:lstStyle/>
+          <a:p>
+            <a:endParaRPr lang="es-MX"/>
+          </a:p>
+        </p:txBody>
       </p:sp>
       <p:sp>
         <p:nvSpPr>
@@ -6260,6 +6610,13 @@
           </a:solidFill>
           <a:ln/>
         </p:spPr>
+        <p:txBody>
+          <a:bodyPr/>
+          <a:lstStyle/>
+          <a:p>
+            <a:endParaRPr lang="es-MX"/>
+          </a:p>
+        </p:txBody>
       </p:sp>
       <p:sp>
         <p:nvSpPr>
@@ -6280,6 +6637,13 @@
           </a:solidFill>
           <a:ln/>
         </p:spPr>
+        <p:txBody>
+          <a:bodyPr/>
+          <a:lstStyle/>
+          <a:p>
+            <a:endParaRPr lang="es-MX"/>
+          </a:p>
+        </p:txBody>
       </p:sp>
       <p:sp>
         <p:nvSpPr>
@@ -6346,6 +6710,13 @@
             <a:prstDash val="solid"/>
           </a:ln>
         </p:spPr>
+        <p:txBody>
+          <a:bodyPr/>
+          <a:lstStyle/>
+          <a:p>
+            <a:endParaRPr lang="es-MX"/>
+          </a:p>
+        </p:txBody>
       </p:sp>
       <p:sp>
         <p:nvSpPr>
@@ -6366,6 +6737,13 @@
           </a:solidFill>
           <a:ln/>
         </p:spPr>
+        <p:txBody>
+          <a:bodyPr/>
+          <a:lstStyle/>
+          <a:p>
+            <a:endParaRPr lang="es-MX"/>
+          </a:p>
+        </p:txBody>
       </p:sp>
       <p:sp>
         <p:nvSpPr>
@@ -6467,6 +6845,13 @@
             <a:prstDash val="solid"/>
           </a:ln>
         </p:spPr>
+        <p:txBody>
+          <a:bodyPr/>
+          <a:lstStyle/>
+          <a:p>
+            <a:endParaRPr lang="es-MX"/>
+          </a:p>
+        </p:txBody>
       </p:sp>
       <p:sp>
         <p:nvSpPr>
@@ -6676,6 +7061,13 @@
           </a:solidFill>
           <a:ln/>
         </p:spPr>
+        <p:txBody>
+          <a:bodyPr/>
+          <a:lstStyle/>
+          <a:p>
+            <a:endParaRPr lang="es-MX"/>
+          </a:p>
+        </p:txBody>
       </p:sp>
       <p:pic>
         <p:nvPicPr>
@@ -6812,6 +7204,13 @@
             </a:outerShdw>
           </a:effectLst>
         </p:spPr>
+        <p:txBody>
+          <a:bodyPr/>
+          <a:lstStyle/>
+          <a:p>
+            <a:endParaRPr lang="es-MX"/>
+          </a:p>
+        </p:txBody>
       </p:sp>
       <p:sp>
         <p:nvSpPr>
@@ -6832,6 +7231,13 @@
           </a:solidFill>
           <a:ln/>
         </p:spPr>
+        <p:txBody>
+          <a:bodyPr/>
+          <a:lstStyle/>
+          <a:p>
+            <a:endParaRPr lang="es-MX"/>
+          </a:p>
+        </p:txBody>
       </p:sp>
       <p:pic>
         <p:nvPicPr>
@@ -6968,6 +7374,13 @@
             </a:outerShdw>
           </a:effectLst>
         </p:spPr>
+        <p:txBody>
+          <a:bodyPr/>
+          <a:lstStyle/>
+          <a:p>
+            <a:endParaRPr lang="es-MX"/>
+          </a:p>
+        </p:txBody>
       </p:sp>
       <p:sp>
         <p:nvSpPr>
@@ -6988,6 +7401,13 @@
           </a:solidFill>
           <a:ln/>
         </p:spPr>
+        <p:txBody>
+          <a:bodyPr/>
+          <a:lstStyle/>
+          <a:p>
+            <a:endParaRPr lang="es-MX"/>
+          </a:p>
+        </p:txBody>
       </p:sp>
       <p:pic>
         <p:nvPicPr>
@@ -7124,6 +7544,13 @@
             </a:outerShdw>
           </a:effectLst>
         </p:spPr>
+        <p:txBody>
+          <a:bodyPr/>
+          <a:lstStyle/>
+          <a:p>
+            <a:endParaRPr lang="es-MX"/>
+          </a:p>
+        </p:txBody>
       </p:sp>
       <p:sp>
         <p:nvSpPr>
@@ -7144,6 +7571,13 @@
           </a:solidFill>
           <a:ln/>
         </p:spPr>
+        <p:txBody>
+          <a:bodyPr/>
+          <a:lstStyle/>
+          <a:p>
+            <a:endParaRPr lang="es-MX"/>
+          </a:p>
+        </p:txBody>
       </p:sp>
       <p:pic>
         <p:nvPicPr>
@@ -7338,6 +7772,13 @@
           </a:solidFill>
           <a:ln/>
         </p:spPr>
+        <p:txBody>
+          <a:bodyPr/>
+          <a:lstStyle/>
+          <a:p>
+            <a:endParaRPr lang="es-MX"/>
+          </a:p>
+        </p:txBody>
       </p:sp>
       <p:pic>
         <p:nvPicPr>
@@ -7462,6 +7903,13 @@
           </a:solidFill>
           <a:ln/>
         </p:spPr>
+        <p:txBody>
+          <a:bodyPr/>
+          <a:lstStyle/>
+          <a:p>
+            <a:endParaRPr lang="es-MX"/>
+          </a:p>
+        </p:txBody>
       </p:sp>
       <p:sp>
         <p:nvSpPr>
@@ -7482,6 +7930,13 @@
           </a:solidFill>
           <a:ln/>
         </p:spPr>
+        <p:txBody>
+          <a:bodyPr/>
+          <a:lstStyle/>
+          <a:p>
+            <a:endParaRPr lang="es-MX"/>
+          </a:p>
+        </p:txBody>
       </p:sp>
       <p:pic>
         <p:nvPicPr>
@@ -7567,6 +8022,13 @@
           </a:solidFill>
           <a:ln/>
         </p:spPr>
+        <p:txBody>
+          <a:bodyPr/>
+          <a:lstStyle/>
+          <a:p>
+            <a:endParaRPr lang="es-MX"/>
+          </a:p>
+        </p:txBody>
       </p:sp>
       <p:sp>
         <p:nvSpPr>
@@ -7587,6 +8049,13 @@
           </a:solidFill>
           <a:ln/>
         </p:spPr>
+        <p:txBody>
+          <a:bodyPr/>
+          <a:lstStyle/>
+          <a:p>
+            <a:endParaRPr lang="es-MX"/>
+          </a:p>
+        </p:txBody>
       </p:sp>
       <p:pic>
         <p:nvPicPr>
@@ -7672,6 +8141,13 @@
           </a:solidFill>
           <a:ln/>
         </p:spPr>
+        <p:txBody>
+          <a:bodyPr/>
+          <a:lstStyle/>
+          <a:p>
+            <a:endParaRPr lang="es-MX"/>
+          </a:p>
+        </p:txBody>
       </p:sp>
       <p:sp>
         <p:nvSpPr>
@@ -7692,6 +8168,13 @@
           </a:solidFill>
           <a:ln/>
         </p:spPr>
+        <p:txBody>
+          <a:bodyPr/>
+          <a:lstStyle/>
+          <a:p>
+            <a:endParaRPr lang="es-MX"/>
+          </a:p>
+        </p:txBody>
       </p:sp>
       <p:pic>
         <p:nvPicPr>
@@ -7777,6 +8260,13 @@
           </a:solidFill>
           <a:ln/>
         </p:spPr>
+        <p:txBody>
+          <a:bodyPr/>
+          <a:lstStyle/>
+          <a:p>
+            <a:endParaRPr lang="es-MX"/>
+          </a:p>
+        </p:txBody>
       </p:sp>
       <p:sp>
         <p:nvSpPr>
@@ -7797,6 +8287,13 @@
           </a:solidFill>
           <a:ln/>
         </p:spPr>
+        <p:txBody>
+          <a:bodyPr/>
+          <a:lstStyle/>
+          <a:p>
+            <a:endParaRPr lang="es-MX"/>
+          </a:p>
+        </p:txBody>
       </p:sp>
       <p:pic>
         <p:nvPicPr>
